--- a/宣道詩/(宣道詩132)禱告良辰.pptx
+++ b/宣道詩/(宣道詩132)禱告良辰.pptx
@@ -162,7 +162,7 @@
           <a:lstStyle/>
           <a:p>
             <a:r>
-              <a:rPr lang="en-US" altLang="zh-TW" smtClean="0"/>
+              <a:rPr lang="en-US" altLang="zh-TW"/>
               <a:t>Click to edit Master title style</a:t>
             </a:r>
             <a:endParaRPr lang="zh-TW" altLang="en-US"/>
@@ -281,7 +281,7 @@
           </a:lstStyle>
           <a:p>
             <a:r>
-              <a:rPr lang="en-US" altLang="zh-TW" smtClean="0"/>
+              <a:rPr lang="en-US" altLang="zh-TW"/>
               <a:t>Click to edit Master subtitle style</a:t>
             </a:r>
             <a:endParaRPr lang="zh-TW" altLang="en-US"/>
@@ -305,7 +305,7 @@
           <a:p>
             <a:fld id="{73DEDBFF-0C8A-4DEA-813D-00C114090525}" type="datetimeFigureOut">
               <a:rPr lang="vi-VN" smtClean="0"/>
-              <a:t>02/07/2021</a:t>
+              <a:t>08/07/2024</a:t>
             </a:fld>
             <a:endParaRPr lang="vi-VN"/>
           </a:p>
@@ -399,7 +399,7 @@
           <a:lstStyle/>
           <a:p>
             <a:r>
-              <a:rPr lang="en-US" altLang="zh-TW" smtClean="0"/>
+              <a:rPr lang="en-US" altLang="zh-TW"/>
               <a:t>Click to edit Master title style</a:t>
             </a:r>
             <a:endParaRPr lang="zh-TW" altLang="en-US"/>
@@ -423,35 +423,35 @@
           <a:p>
             <a:pPr lvl="0"/>
             <a:r>
-              <a:rPr lang="en-US" altLang="zh-TW" smtClean="0"/>
+              <a:rPr lang="en-US" altLang="zh-TW"/>
               <a:t>Edit Master text styles</a:t>
             </a:r>
           </a:p>
           <a:p>
             <a:pPr lvl="1"/>
             <a:r>
-              <a:rPr lang="en-US" altLang="zh-TW" smtClean="0"/>
+              <a:rPr lang="en-US" altLang="zh-TW"/>
               <a:t>Second level</a:t>
             </a:r>
           </a:p>
           <a:p>
             <a:pPr lvl="2"/>
             <a:r>
-              <a:rPr lang="en-US" altLang="zh-TW" smtClean="0"/>
+              <a:rPr lang="en-US" altLang="zh-TW"/>
               <a:t>Third level</a:t>
             </a:r>
           </a:p>
           <a:p>
             <a:pPr lvl="3"/>
             <a:r>
-              <a:rPr lang="en-US" altLang="zh-TW" smtClean="0"/>
+              <a:rPr lang="en-US" altLang="zh-TW"/>
               <a:t>Fourth level</a:t>
             </a:r>
           </a:p>
           <a:p>
             <a:pPr lvl="4"/>
             <a:r>
-              <a:rPr lang="en-US" altLang="zh-TW" smtClean="0"/>
+              <a:rPr lang="en-US" altLang="zh-TW"/>
               <a:t>Fifth level</a:t>
             </a:r>
             <a:endParaRPr lang="zh-TW" altLang="en-US"/>
@@ -475,7 +475,7 @@
           <a:p>
             <a:fld id="{73DEDBFF-0C8A-4DEA-813D-00C114090525}" type="datetimeFigureOut">
               <a:rPr lang="vi-VN" smtClean="0"/>
-              <a:t>02/07/2021</a:t>
+              <a:t>08/07/2024</a:t>
             </a:fld>
             <a:endParaRPr lang="vi-VN"/>
           </a:p>
@@ -574,7 +574,7 @@
           <a:lstStyle/>
           <a:p>
             <a:r>
-              <a:rPr lang="en-US" altLang="zh-TW" smtClean="0"/>
+              <a:rPr lang="en-US" altLang="zh-TW"/>
               <a:t>Click to edit Master title style</a:t>
             </a:r>
             <a:endParaRPr lang="zh-TW" altLang="en-US"/>
@@ -603,35 +603,35 @@
           <a:p>
             <a:pPr lvl="0"/>
             <a:r>
-              <a:rPr lang="en-US" altLang="zh-TW" smtClean="0"/>
+              <a:rPr lang="en-US" altLang="zh-TW"/>
               <a:t>Edit Master text styles</a:t>
             </a:r>
           </a:p>
           <a:p>
             <a:pPr lvl="1"/>
             <a:r>
-              <a:rPr lang="en-US" altLang="zh-TW" smtClean="0"/>
+              <a:rPr lang="en-US" altLang="zh-TW"/>
               <a:t>Second level</a:t>
             </a:r>
           </a:p>
           <a:p>
             <a:pPr lvl="2"/>
             <a:r>
-              <a:rPr lang="en-US" altLang="zh-TW" smtClean="0"/>
+              <a:rPr lang="en-US" altLang="zh-TW"/>
               <a:t>Third level</a:t>
             </a:r>
           </a:p>
           <a:p>
             <a:pPr lvl="3"/>
             <a:r>
-              <a:rPr lang="en-US" altLang="zh-TW" smtClean="0"/>
+              <a:rPr lang="en-US" altLang="zh-TW"/>
               <a:t>Fourth level</a:t>
             </a:r>
           </a:p>
           <a:p>
             <a:pPr lvl="4"/>
             <a:r>
-              <a:rPr lang="en-US" altLang="zh-TW" smtClean="0"/>
+              <a:rPr lang="en-US" altLang="zh-TW"/>
               <a:t>Fifth level</a:t>
             </a:r>
             <a:endParaRPr lang="zh-TW" altLang="en-US"/>
@@ -655,7 +655,7 @@
           <a:p>
             <a:fld id="{73DEDBFF-0C8A-4DEA-813D-00C114090525}" type="datetimeFigureOut">
               <a:rPr lang="vi-VN" smtClean="0"/>
-              <a:t>02/07/2021</a:t>
+              <a:t>08/07/2024</a:t>
             </a:fld>
             <a:endParaRPr lang="vi-VN"/>
           </a:p>
@@ -749,7 +749,7 @@
           <a:lstStyle/>
           <a:p>
             <a:r>
-              <a:rPr lang="en-US" altLang="zh-TW" smtClean="0"/>
+              <a:rPr lang="en-US" altLang="zh-TW"/>
               <a:t>Click to edit Master title style</a:t>
             </a:r>
             <a:endParaRPr lang="zh-TW" altLang="en-US"/>
@@ -773,35 +773,35 @@
           <a:p>
             <a:pPr lvl="0"/>
             <a:r>
-              <a:rPr lang="en-US" altLang="zh-TW" smtClean="0"/>
+              <a:rPr lang="en-US" altLang="zh-TW"/>
               <a:t>Edit Master text styles</a:t>
             </a:r>
           </a:p>
           <a:p>
             <a:pPr lvl="1"/>
             <a:r>
-              <a:rPr lang="en-US" altLang="zh-TW" smtClean="0"/>
+              <a:rPr lang="en-US" altLang="zh-TW"/>
               <a:t>Second level</a:t>
             </a:r>
           </a:p>
           <a:p>
             <a:pPr lvl="2"/>
             <a:r>
-              <a:rPr lang="en-US" altLang="zh-TW" smtClean="0"/>
+              <a:rPr lang="en-US" altLang="zh-TW"/>
               <a:t>Third level</a:t>
             </a:r>
           </a:p>
           <a:p>
             <a:pPr lvl="3"/>
             <a:r>
-              <a:rPr lang="en-US" altLang="zh-TW" smtClean="0"/>
+              <a:rPr lang="en-US" altLang="zh-TW"/>
               <a:t>Fourth level</a:t>
             </a:r>
           </a:p>
           <a:p>
             <a:pPr lvl="4"/>
             <a:r>
-              <a:rPr lang="en-US" altLang="zh-TW" smtClean="0"/>
+              <a:rPr lang="en-US" altLang="zh-TW"/>
               <a:t>Fifth level</a:t>
             </a:r>
             <a:endParaRPr lang="zh-TW" altLang="en-US"/>
@@ -825,7 +825,7 @@
           <a:p>
             <a:fld id="{73DEDBFF-0C8A-4DEA-813D-00C114090525}" type="datetimeFigureOut">
               <a:rPr lang="vi-VN" smtClean="0"/>
-              <a:t>02/07/2021</a:t>
+              <a:t>08/07/2024</a:t>
             </a:fld>
             <a:endParaRPr lang="vi-VN"/>
           </a:p>
@@ -928,7 +928,7 @@
           </a:lstStyle>
           <a:p>
             <a:r>
-              <a:rPr lang="en-US" altLang="zh-TW" smtClean="0"/>
+              <a:rPr lang="en-US" altLang="zh-TW"/>
               <a:t>Click to edit Master title style</a:t>
             </a:r>
             <a:endParaRPr lang="zh-TW" altLang="en-US"/>
@@ -1048,7 +1048,7 @@
           <a:p>
             <a:pPr lvl="0"/>
             <a:r>
-              <a:rPr lang="en-US" altLang="zh-TW" smtClean="0"/>
+              <a:rPr lang="en-US" altLang="zh-TW"/>
               <a:t>Edit Master text styles</a:t>
             </a:r>
           </a:p>
@@ -1071,7 +1071,7 @@
           <a:p>
             <a:fld id="{73DEDBFF-0C8A-4DEA-813D-00C114090525}" type="datetimeFigureOut">
               <a:rPr lang="vi-VN" smtClean="0"/>
-              <a:t>02/07/2021</a:t>
+              <a:t>08/07/2024</a:t>
             </a:fld>
             <a:endParaRPr lang="vi-VN"/>
           </a:p>
@@ -1165,7 +1165,7 @@
           <a:lstStyle/>
           <a:p>
             <a:r>
-              <a:rPr lang="en-US" altLang="zh-TW" smtClean="0"/>
+              <a:rPr lang="en-US" altLang="zh-TW"/>
               <a:t>Click to edit Master title style</a:t>
             </a:r>
             <a:endParaRPr lang="zh-TW" altLang="en-US"/>
@@ -1222,35 +1222,35 @@
           <a:p>
             <a:pPr lvl="0"/>
             <a:r>
-              <a:rPr lang="en-US" altLang="zh-TW" smtClean="0"/>
+              <a:rPr lang="en-US" altLang="zh-TW"/>
               <a:t>Edit Master text styles</a:t>
             </a:r>
           </a:p>
           <a:p>
             <a:pPr lvl="1"/>
             <a:r>
-              <a:rPr lang="en-US" altLang="zh-TW" smtClean="0"/>
+              <a:rPr lang="en-US" altLang="zh-TW"/>
               <a:t>Second level</a:t>
             </a:r>
           </a:p>
           <a:p>
             <a:pPr lvl="2"/>
             <a:r>
-              <a:rPr lang="en-US" altLang="zh-TW" smtClean="0"/>
+              <a:rPr lang="en-US" altLang="zh-TW"/>
               <a:t>Third level</a:t>
             </a:r>
           </a:p>
           <a:p>
             <a:pPr lvl="3"/>
             <a:r>
-              <a:rPr lang="en-US" altLang="zh-TW" smtClean="0"/>
+              <a:rPr lang="en-US" altLang="zh-TW"/>
               <a:t>Fourth level</a:t>
             </a:r>
           </a:p>
           <a:p>
             <a:pPr lvl="4"/>
             <a:r>
-              <a:rPr lang="en-US" altLang="zh-TW" smtClean="0"/>
+              <a:rPr lang="en-US" altLang="zh-TW"/>
               <a:t>Fifth level</a:t>
             </a:r>
             <a:endParaRPr lang="zh-TW" altLang="en-US"/>
@@ -1307,35 +1307,35 @@
           <a:p>
             <a:pPr lvl="0"/>
             <a:r>
-              <a:rPr lang="en-US" altLang="zh-TW" smtClean="0"/>
+              <a:rPr lang="en-US" altLang="zh-TW"/>
               <a:t>Edit Master text styles</a:t>
             </a:r>
           </a:p>
           <a:p>
             <a:pPr lvl="1"/>
             <a:r>
-              <a:rPr lang="en-US" altLang="zh-TW" smtClean="0"/>
+              <a:rPr lang="en-US" altLang="zh-TW"/>
               <a:t>Second level</a:t>
             </a:r>
           </a:p>
           <a:p>
             <a:pPr lvl="2"/>
             <a:r>
-              <a:rPr lang="en-US" altLang="zh-TW" smtClean="0"/>
+              <a:rPr lang="en-US" altLang="zh-TW"/>
               <a:t>Third level</a:t>
             </a:r>
           </a:p>
           <a:p>
             <a:pPr lvl="3"/>
             <a:r>
-              <a:rPr lang="en-US" altLang="zh-TW" smtClean="0"/>
+              <a:rPr lang="en-US" altLang="zh-TW"/>
               <a:t>Fourth level</a:t>
             </a:r>
           </a:p>
           <a:p>
             <a:pPr lvl="4"/>
             <a:r>
-              <a:rPr lang="en-US" altLang="zh-TW" smtClean="0"/>
+              <a:rPr lang="en-US" altLang="zh-TW"/>
               <a:t>Fifth level</a:t>
             </a:r>
             <a:endParaRPr lang="zh-TW" altLang="en-US"/>
@@ -1359,7 +1359,7 @@
           <a:p>
             <a:fld id="{73DEDBFF-0C8A-4DEA-813D-00C114090525}" type="datetimeFigureOut">
               <a:rPr lang="vi-VN" smtClean="0"/>
-              <a:t>02/07/2021</a:t>
+              <a:t>08/07/2024</a:t>
             </a:fld>
             <a:endParaRPr lang="vi-VN"/>
           </a:p>
@@ -1457,7 +1457,7 @@
           </a:lstStyle>
           <a:p>
             <a:r>
-              <a:rPr lang="en-US" altLang="zh-TW" smtClean="0"/>
+              <a:rPr lang="en-US" altLang="zh-TW"/>
               <a:t>Click to edit Master title style</a:t>
             </a:r>
             <a:endParaRPr lang="zh-TW" altLang="en-US"/>
@@ -1523,7 +1523,7 @@
           <a:p>
             <a:pPr lvl="0"/>
             <a:r>
-              <a:rPr lang="en-US" altLang="zh-TW" smtClean="0"/>
+              <a:rPr lang="en-US" altLang="zh-TW"/>
               <a:t>Edit Master text styles</a:t>
             </a:r>
           </a:p>
@@ -1579,35 +1579,35 @@
           <a:p>
             <a:pPr lvl="0"/>
             <a:r>
-              <a:rPr lang="en-US" altLang="zh-TW" smtClean="0"/>
+              <a:rPr lang="en-US" altLang="zh-TW"/>
               <a:t>Edit Master text styles</a:t>
             </a:r>
           </a:p>
           <a:p>
             <a:pPr lvl="1"/>
             <a:r>
-              <a:rPr lang="en-US" altLang="zh-TW" smtClean="0"/>
+              <a:rPr lang="en-US" altLang="zh-TW"/>
               <a:t>Second level</a:t>
             </a:r>
           </a:p>
           <a:p>
             <a:pPr lvl="2"/>
             <a:r>
-              <a:rPr lang="en-US" altLang="zh-TW" smtClean="0"/>
+              <a:rPr lang="en-US" altLang="zh-TW"/>
               <a:t>Third level</a:t>
             </a:r>
           </a:p>
           <a:p>
             <a:pPr lvl="3"/>
             <a:r>
-              <a:rPr lang="en-US" altLang="zh-TW" smtClean="0"/>
+              <a:rPr lang="en-US" altLang="zh-TW"/>
               <a:t>Fourth level</a:t>
             </a:r>
           </a:p>
           <a:p>
             <a:pPr lvl="4"/>
             <a:r>
-              <a:rPr lang="en-US" altLang="zh-TW" smtClean="0"/>
+              <a:rPr lang="en-US" altLang="zh-TW"/>
               <a:t>Fifth level</a:t>
             </a:r>
             <a:endParaRPr lang="zh-TW" altLang="en-US"/>
@@ -1673,7 +1673,7 @@
           <a:p>
             <a:pPr lvl="0"/>
             <a:r>
-              <a:rPr lang="en-US" altLang="zh-TW" smtClean="0"/>
+              <a:rPr lang="en-US" altLang="zh-TW"/>
               <a:t>Edit Master text styles</a:t>
             </a:r>
           </a:p>
@@ -1729,35 +1729,35 @@
           <a:p>
             <a:pPr lvl="0"/>
             <a:r>
-              <a:rPr lang="en-US" altLang="zh-TW" smtClean="0"/>
+              <a:rPr lang="en-US" altLang="zh-TW"/>
               <a:t>Edit Master text styles</a:t>
             </a:r>
           </a:p>
           <a:p>
             <a:pPr lvl="1"/>
             <a:r>
-              <a:rPr lang="en-US" altLang="zh-TW" smtClean="0"/>
+              <a:rPr lang="en-US" altLang="zh-TW"/>
               <a:t>Second level</a:t>
             </a:r>
           </a:p>
           <a:p>
             <a:pPr lvl="2"/>
             <a:r>
-              <a:rPr lang="en-US" altLang="zh-TW" smtClean="0"/>
+              <a:rPr lang="en-US" altLang="zh-TW"/>
               <a:t>Third level</a:t>
             </a:r>
           </a:p>
           <a:p>
             <a:pPr lvl="3"/>
             <a:r>
-              <a:rPr lang="en-US" altLang="zh-TW" smtClean="0"/>
+              <a:rPr lang="en-US" altLang="zh-TW"/>
               <a:t>Fourth level</a:t>
             </a:r>
           </a:p>
           <a:p>
             <a:pPr lvl="4"/>
             <a:r>
-              <a:rPr lang="en-US" altLang="zh-TW" smtClean="0"/>
+              <a:rPr lang="en-US" altLang="zh-TW"/>
               <a:t>Fifth level</a:t>
             </a:r>
             <a:endParaRPr lang="zh-TW" altLang="en-US"/>
@@ -1781,7 +1781,7 @@
           <a:p>
             <a:fld id="{73DEDBFF-0C8A-4DEA-813D-00C114090525}" type="datetimeFigureOut">
               <a:rPr lang="vi-VN" smtClean="0"/>
-              <a:t>02/07/2021</a:t>
+              <a:t>08/07/2024</a:t>
             </a:fld>
             <a:endParaRPr lang="vi-VN"/>
           </a:p>
@@ -1875,7 +1875,7 @@
           <a:lstStyle/>
           <a:p>
             <a:r>
-              <a:rPr lang="en-US" altLang="zh-TW" smtClean="0"/>
+              <a:rPr lang="en-US" altLang="zh-TW"/>
               <a:t>Click to edit Master title style</a:t>
             </a:r>
             <a:endParaRPr lang="zh-TW" altLang="en-US"/>
@@ -1899,7 +1899,7 @@
           <a:p>
             <a:fld id="{73DEDBFF-0C8A-4DEA-813D-00C114090525}" type="datetimeFigureOut">
               <a:rPr lang="vi-VN" smtClean="0"/>
-              <a:t>02/07/2021</a:t>
+              <a:t>08/07/2024</a:t>
             </a:fld>
             <a:endParaRPr lang="vi-VN"/>
           </a:p>
@@ -1994,7 +1994,7 @@
           <a:p>
             <a:fld id="{73DEDBFF-0C8A-4DEA-813D-00C114090525}" type="datetimeFigureOut">
               <a:rPr lang="vi-VN" smtClean="0"/>
-              <a:t>02/07/2021</a:t>
+              <a:t>08/07/2024</a:t>
             </a:fld>
             <a:endParaRPr lang="vi-VN"/>
           </a:p>
@@ -2097,7 +2097,7 @@
           </a:lstStyle>
           <a:p>
             <a:r>
-              <a:rPr lang="en-US" altLang="zh-TW" smtClean="0"/>
+              <a:rPr lang="en-US" altLang="zh-TW"/>
               <a:t>Click to edit Master title style</a:t>
             </a:r>
             <a:endParaRPr lang="zh-TW" altLang="en-US"/>
@@ -2154,35 +2154,35 @@
           <a:p>
             <a:pPr lvl="0"/>
             <a:r>
-              <a:rPr lang="en-US" altLang="zh-TW" smtClean="0"/>
+              <a:rPr lang="en-US" altLang="zh-TW"/>
               <a:t>Edit Master text styles</a:t>
             </a:r>
           </a:p>
           <a:p>
             <a:pPr lvl="1"/>
             <a:r>
-              <a:rPr lang="en-US" altLang="zh-TW" smtClean="0"/>
+              <a:rPr lang="en-US" altLang="zh-TW"/>
               <a:t>Second level</a:t>
             </a:r>
           </a:p>
           <a:p>
             <a:pPr lvl="2"/>
             <a:r>
-              <a:rPr lang="en-US" altLang="zh-TW" smtClean="0"/>
+              <a:rPr lang="en-US" altLang="zh-TW"/>
               <a:t>Third level</a:t>
             </a:r>
           </a:p>
           <a:p>
             <a:pPr lvl="3"/>
             <a:r>
-              <a:rPr lang="en-US" altLang="zh-TW" smtClean="0"/>
+              <a:rPr lang="en-US" altLang="zh-TW"/>
               <a:t>Fourth level</a:t>
             </a:r>
           </a:p>
           <a:p>
             <a:pPr lvl="4"/>
             <a:r>
-              <a:rPr lang="en-US" altLang="zh-TW" smtClean="0"/>
+              <a:rPr lang="en-US" altLang="zh-TW"/>
               <a:t>Fifth level</a:t>
             </a:r>
             <a:endParaRPr lang="zh-TW" altLang="en-US"/>
@@ -2248,7 +2248,7 @@
           <a:p>
             <a:pPr lvl="0"/>
             <a:r>
-              <a:rPr lang="en-US" altLang="zh-TW" smtClean="0"/>
+              <a:rPr lang="en-US" altLang="zh-TW"/>
               <a:t>Edit Master text styles</a:t>
             </a:r>
           </a:p>
@@ -2271,7 +2271,7 @@
           <a:p>
             <a:fld id="{73DEDBFF-0C8A-4DEA-813D-00C114090525}" type="datetimeFigureOut">
               <a:rPr lang="vi-VN" smtClean="0"/>
-              <a:t>02/07/2021</a:t>
+              <a:t>08/07/2024</a:t>
             </a:fld>
             <a:endParaRPr lang="vi-VN"/>
           </a:p>
@@ -2374,7 +2374,7 @@
           </a:lstStyle>
           <a:p>
             <a:r>
-              <a:rPr lang="en-US" altLang="zh-TW" smtClean="0"/>
+              <a:rPr lang="en-US" altLang="zh-TW"/>
               <a:t>Click to edit Master title style</a:t>
             </a:r>
             <a:endParaRPr lang="zh-TW" altLang="en-US"/>
@@ -2439,7 +2439,7 @@
           </a:lstStyle>
           <a:p>
             <a:r>
-              <a:rPr lang="en-US" altLang="zh-TW" smtClean="0"/>
+              <a:rPr lang="en-US" altLang="zh-TW"/>
               <a:t>Click icon to add picture</a:t>
             </a:r>
             <a:endParaRPr lang="zh-TW" altLang="en-US"/>
@@ -2505,7 +2505,7 @@
           <a:p>
             <a:pPr lvl="0"/>
             <a:r>
-              <a:rPr lang="en-US" altLang="zh-TW" smtClean="0"/>
+              <a:rPr lang="en-US" altLang="zh-TW"/>
               <a:t>Edit Master text styles</a:t>
             </a:r>
           </a:p>
@@ -2528,7 +2528,7 @@
           <a:p>
             <a:fld id="{73DEDBFF-0C8A-4DEA-813D-00C114090525}" type="datetimeFigureOut">
               <a:rPr lang="vi-VN" smtClean="0"/>
-              <a:t>02/07/2021</a:t>
+              <a:t>08/07/2024</a:t>
             </a:fld>
             <a:endParaRPr lang="vi-VN"/>
           </a:p>
@@ -2642,10 +2642,9 @@
           <a:lstStyle/>
           <a:p>
             <a:r>
-              <a:rPr lang="zh-TW" altLang="en-US" smtClean="0"/>
+              <a:rPr lang="zh-TW" altLang="en-US"/>
               <a:t>按一下以編輯母片標題樣式</a:t>
             </a:r>
-            <a:endParaRPr lang="zh-TW" altLang="en-US"/>
           </a:p>
         </p:txBody>
       </p:sp>
@@ -2676,38 +2675,37 @@
           <a:p>
             <a:pPr lvl="0"/>
             <a:r>
-              <a:rPr lang="zh-TW" altLang="en-US" smtClean="0"/>
+              <a:rPr lang="zh-TW" altLang="en-US"/>
               <a:t>按一下以編輯母片文字樣式</a:t>
             </a:r>
           </a:p>
           <a:p>
             <a:pPr lvl="1"/>
             <a:r>
-              <a:rPr lang="zh-TW" altLang="en-US" smtClean="0"/>
+              <a:rPr lang="zh-TW" altLang="en-US"/>
               <a:t>第二層</a:t>
             </a:r>
           </a:p>
           <a:p>
             <a:pPr lvl="2"/>
             <a:r>
-              <a:rPr lang="zh-TW" altLang="en-US" smtClean="0"/>
+              <a:rPr lang="zh-TW" altLang="en-US"/>
               <a:t>第三層</a:t>
             </a:r>
           </a:p>
           <a:p>
             <a:pPr lvl="3"/>
             <a:r>
-              <a:rPr lang="zh-TW" altLang="en-US" smtClean="0"/>
+              <a:rPr lang="zh-TW" altLang="en-US"/>
               <a:t>第四層</a:t>
             </a:r>
           </a:p>
           <a:p>
             <a:pPr lvl="4"/>
             <a:r>
-              <a:rPr lang="zh-TW" altLang="en-US" smtClean="0"/>
+              <a:rPr lang="zh-TW" altLang="en-US"/>
               <a:t>第五層</a:t>
             </a:r>
-            <a:endParaRPr lang="zh-TW" altLang="en-US"/>
           </a:p>
         </p:txBody>
       </p:sp>
@@ -2746,7 +2744,7 @@
           <a:p>
             <a:fld id="{73DEDBFF-0C8A-4DEA-813D-00C114090525}" type="datetimeFigureOut">
               <a:rPr lang="vi-VN" smtClean="0"/>
-              <a:t>02/07/2021</a:t>
+              <a:t>08/07/2024</a:t>
             </a:fld>
             <a:endParaRPr lang="vi-VN"/>
           </a:p>
@@ -3177,23 +3175,6 @@
               </a:rPr>
               <a:t>132</a:t>
             </a:r>
-            <a:r>
-              <a:rPr lang="en-US" altLang="zh-CN" sz="7200" b="1" i="1" dirty="0">
-                <a:solidFill>
-                  <a:schemeClr val="bg1"/>
-                </a:solidFill>
-                <a:effectLst>
-                  <a:outerShdw blurRad="38100" dist="38100" dir="2700000" algn="tl">
-                    <a:srgbClr val="000000">
-                      <a:alpha val="43137"/>
-                    </a:srgbClr>
-                  </a:outerShdw>
-                </a:effectLst>
-                <a:latin typeface="微軟正黑體" pitchFamily="34" charset="-120"/>
-                <a:ea typeface="微軟正黑體" pitchFamily="34" charset="-120"/>
-              </a:rPr>
-              <a:t/>
-            </a:r>
             <a:br>
               <a:rPr lang="en-US" altLang="zh-CN" sz="7200" b="1" i="1" dirty="0">
                 <a:solidFill>
@@ -3254,13 +3235,6 @@
   <p:clrMapOvr>
     <a:masterClrMapping/>
   </p:clrMapOvr>
-  <p:timing>
-    <p:tnLst>
-      <p:par>
-        <p:cTn id="1" dur="indefinite" restart="never" nodeType="tmRoot"/>
-      </p:par>
-    </p:tnLst>
-  </p:timing>
 </p:sld>
 </file>
 
@@ -3361,7 +3335,7 @@
         <p:spPr>
           <a:xfrm>
             <a:off x="0" y="5061182"/>
-            <a:ext cx="12192000" cy="830997"/>
+            <a:ext cx="12192000" cy="646331"/>
           </a:xfrm>
           <a:prstGeom prst="rect">
             <a:avLst/>
@@ -3376,19 +3350,17 @@
           <a:p>
             <a:pPr algn="ctr"/>
             <a:r>
-              <a:rPr lang="en-US" sz="4800" b="1" dirty="0">
+              <a:rPr lang="en-US" sz="3600" b="1" dirty="0">
                 <a:solidFill>
                   <a:srgbClr val="000066"/>
                 </a:solidFill>
-                <a:effectLst/>
               </a:rPr>
-              <a:t>( 3 )</a:t>
-            </a:r>
-            <a:endParaRPr lang="vi-VN" sz="4800" b="1" dirty="0">
+              <a:t>( 3 / 3 )</a:t>
+            </a:r>
+            <a:endParaRPr lang="vi-VN" sz="3600" b="1" dirty="0">
               <a:solidFill>
                 <a:srgbClr val="000066"/>
               </a:solidFill>
-              <a:effectLst/>
             </a:endParaRPr>
           </a:p>
         </p:txBody>
@@ -3403,13 +3375,6 @@
   <p:clrMapOvr>
     <a:masterClrMapping/>
   </p:clrMapOvr>
-  <p:timing>
-    <p:tnLst>
-      <p:par>
-        <p:cTn id="1" dur="indefinite" restart="never" nodeType="tmRoot"/>
-      </p:par>
-    </p:tnLst>
-  </p:timing>
 </p:sld>
 </file>
 
@@ -3510,7 +3475,7 @@
         <p:spPr>
           <a:xfrm>
             <a:off x="0" y="5061182"/>
-            <a:ext cx="12192000" cy="830997"/>
+            <a:ext cx="12192000" cy="646331"/>
           </a:xfrm>
           <a:prstGeom prst="rect">
             <a:avLst/>
@@ -3525,19 +3490,17 @@
           <a:p>
             <a:pPr algn="ctr"/>
             <a:r>
-              <a:rPr lang="en-US" sz="4800" b="1" dirty="0">
+              <a:rPr lang="en-US" sz="3600" b="1" dirty="0">
                 <a:solidFill>
                   <a:srgbClr val="000066"/>
                 </a:solidFill>
-                <a:effectLst/>
               </a:rPr>
-              <a:t>( 3 )</a:t>
-            </a:r>
-            <a:endParaRPr lang="vi-VN" sz="4800" b="1" dirty="0">
+              <a:t>( 3 / 3 )</a:t>
+            </a:r>
+            <a:endParaRPr lang="vi-VN" sz="3600" b="1" dirty="0">
               <a:solidFill>
                 <a:srgbClr val="000066"/>
               </a:solidFill>
-              <a:effectLst/>
             </a:endParaRPr>
           </a:p>
         </p:txBody>
@@ -3552,13 +3515,6 @@
   <p:clrMapOvr>
     <a:masterClrMapping/>
   </p:clrMapOvr>
-  <p:timing>
-    <p:tnLst>
-      <p:par>
-        <p:cTn id="1" dur="indefinite" restart="never" nodeType="tmRoot"/>
-      </p:par>
-    </p:tnLst>
-  </p:timing>
 </p:sld>
 </file>
 
@@ -3659,7 +3615,7 @@
         <p:spPr>
           <a:xfrm>
             <a:off x="0" y="5061182"/>
-            <a:ext cx="12192000" cy="830997"/>
+            <a:ext cx="12192000" cy="646331"/>
           </a:xfrm>
           <a:prstGeom prst="rect">
             <a:avLst/>
@@ -3674,19 +3630,17 @@
           <a:p>
             <a:pPr algn="ctr"/>
             <a:r>
-              <a:rPr lang="en-US" sz="4800" b="1" dirty="0">
+              <a:rPr lang="en-US" sz="3600" b="1" dirty="0">
                 <a:solidFill>
                   <a:srgbClr val="000066"/>
                 </a:solidFill>
-                <a:effectLst/>
               </a:rPr>
-              <a:t>( 3 )</a:t>
-            </a:r>
-            <a:endParaRPr lang="vi-VN" sz="4800" b="1" dirty="0">
+              <a:t>( 3 / 3 )</a:t>
+            </a:r>
+            <a:endParaRPr lang="vi-VN" sz="3600" b="1" dirty="0">
               <a:solidFill>
                 <a:srgbClr val="000066"/>
               </a:solidFill>
-              <a:effectLst/>
             </a:endParaRPr>
           </a:p>
         </p:txBody>
@@ -3701,13 +3655,6 @@
   <p:clrMapOvr>
     <a:masterClrMapping/>
   </p:clrMapOvr>
-  <p:timing>
-    <p:tnLst>
-      <p:par>
-        <p:cTn id="1" dur="indefinite" restart="never" nodeType="tmRoot"/>
-      </p:par>
-    </p:tnLst>
-  </p:timing>
 </p:sld>
 </file>
 
@@ -3808,7 +3755,7 @@
         <p:spPr>
           <a:xfrm>
             <a:off x="0" y="5061182"/>
-            <a:ext cx="12192000" cy="830997"/>
+            <a:ext cx="12192000" cy="646331"/>
           </a:xfrm>
           <a:prstGeom prst="rect">
             <a:avLst/>
@@ -3823,19 +3770,17 @@
           <a:p>
             <a:pPr algn="ctr"/>
             <a:r>
-              <a:rPr lang="en-US" sz="4800" b="1" dirty="0">
+              <a:rPr lang="en-US" sz="3600" b="1" dirty="0">
                 <a:solidFill>
                   <a:srgbClr val="000066"/>
                 </a:solidFill>
-                <a:effectLst/>
               </a:rPr>
-              <a:t>( 3 )</a:t>
-            </a:r>
-            <a:endParaRPr lang="vi-VN" sz="4800" b="1" dirty="0">
+              <a:t>( 3 / 3 )</a:t>
+            </a:r>
+            <a:endParaRPr lang="vi-VN" sz="3600" b="1" dirty="0">
               <a:solidFill>
                 <a:srgbClr val="000066"/>
               </a:solidFill>
-              <a:effectLst/>
             </a:endParaRPr>
           </a:p>
         </p:txBody>
@@ -3850,13 +3795,6 @@
   <p:clrMapOvr>
     <a:masterClrMapping/>
   </p:clrMapOvr>
-  <p:timing>
-    <p:tnLst>
-      <p:par>
-        <p:cTn id="1" dur="indefinite" restart="never" nodeType="tmRoot"/>
-      </p:par>
-    </p:tnLst>
-  </p:timing>
 </p:sld>
 </file>
 
@@ -3957,7 +3895,7 @@
         <p:spPr>
           <a:xfrm>
             <a:off x="0" y="5061182"/>
-            <a:ext cx="12192000" cy="830997"/>
+            <a:ext cx="12192000" cy="646331"/>
           </a:xfrm>
           <a:prstGeom prst="rect">
             <a:avLst/>
@@ -3972,15 +3910,15 @@
           <a:p>
             <a:pPr algn="ctr"/>
             <a:r>
-              <a:rPr lang="en-US" sz="4800" b="1" dirty="0">
+              <a:rPr lang="en-US" sz="3600" b="1" dirty="0">
                 <a:solidFill>
                   <a:srgbClr val="000066"/>
                 </a:solidFill>
                 <a:effectLst/>
               </a:rPr>
-              <a:t>( 1 )</a:t>
-            </a:r>
-            <a:endParaRPr lang="vi-VN" sz="4800" b="1" dirty="0">
+              <a:t>( 1 / 3 )</a:t>
+            </a:r>
+            <a:endParaRPr lang="vi-VN" sz="3600" b="1" dirty="0">
               <a:solidFill>
                 <a:srgbClr val="000066"/>
               </a:solidFill>
@@ -3999,13 +3937,6 @@
   <p:clrMapOvr>
     <a:masterClrMapping/>
   </p:clrMapOvr>
-  <p:timing>
-    <p:tnLst>
-      <p:par>
-        <p:cTn id="1" dur="indefinite" restart="never" nodeType="tmRoot"/>
-      </p:par>
-    </p:tnLst>
-  </p:timing>
 </p:sld>
 </file>
 
@@ -4106,7 +4037,7 @@
         <p:spPr>
           <a:xfrm>
             <a:off x="0" y="5061182"/>
-            <a:ext cx="12192000" cy="830997"/>
+            <a:ext cx="12192000" cy="646331"/>
           </a:xfrm>
           <a:prstGeom prst="rect">
             <a:avLst/>
@@ -4121,19 +4052,17 @@
           <a:p>
             <a:pPr algn="ctr"/>
             <a:r>
-              <a:rPr lang="en-US" sz="4800" b="1" dirty="0">
+              <a:rPr lang="en-US" sz="3600" b="1" dirty="0">
                 <a:solidFill>
                   <a:srgbClr val="000066"/>
                 </a:solidFill>
-                <a:effectLst/>
               </a:rPr>
-              <a:t>( 1 )</a:t>
-            </a:r>
-            <a:endParaRPr lang="vi-VN" sz="4800" b="1" dirty="0">
+              <a:t>( 1 / 3 )</a:t>
+            </a:r>
+            <a:endParaRPr lang="vi-VN" sz="3600" b="1" dirty="0">
               <a:solidFill>
                 <a:srgbClr val="000066"/>
               </a:solidFill>
-              <a:effectLst/>
             </a:endParaRPr>
           </a:p>
         </p:txBody>
@@ -4148,13 +4077,6 @@
   <p:clrMapOvr>
     <a:masterClrMapping/>
   </p:clrMapOvr>
-  <p:timing>
-    <p:tnLst>
-      <p:par>
-        <p:cTn id="1" dur="indefinite" restart="never" nodeType="tmRoot"/>
-      </p:par>
-    </p:tnLst>
-  </p:timing>
 </p:sld>
 </file>
 
@@ -4255,7 +4177,7 @@
         <p:spPr>
           <a:xfrm>
             <a:off x="0" y="5061182"/>
-            <a:ext cx="12192000" cy="830997"/>
+            <a:ext cx="12192000" cy="646331"/>
           </a:xfrm>
           <a:prstGeom prst="rect">
             <a:avLst/>
@@ -4270,19 +4192,17 @@
           <a:p>
             <a:pPr algn="ctr"/>
             <a:r>
-              <a:rPr lang="en-US" sz="4800" b="1" dirty="0">
+              <a:rPr lang="en-US" sz="3600" b="1" dirty="0">
                 <a:solidFill>
                   <a:srgbClr val="000066"/>
                 </a:solidFill>
-                <a:effectLst/>
               </a:rPr>
-              <a:t>( 1 )</a:t>
-            </a:r>
-            <a:endParaRPr lang="vi-VN" sz="4800" b="1" dirty="0">
+              <a:t>( 1 / 3 )</a:t>
+            </a:r>
+            <a:endParaRPr lang="vi-VN" sz="3600" b="1" dirty="0">
               <a:solidFill>
                 <a:srgbClr val="000066"/>
               </a:solidFill>
-              <a:effectLst/>
             </a:endParaRPr>
           </a:p>
         </p:txBody>
@@ -4297,13 +4217,6 @@
   <p:clrMapOvr>
     <a:masterClrMapping/>
   </p:clrMapOvr>
-  <p:timing>
-    <p:tnLst>
-      <p:par>
-        <p:cTn id="1" dur="indefinite" restart="never" nodeType="tmRoot"/>
-      </p:par>
-    </p:tnLst>
-  </p:timing>
 </p:sld>
 </file>
 
@@ -4404,7 +4317,7 @@
         <p:spPr>
           <a:xfrm>
             <a:off x="0" y="5061182"/>
-            <a:ext cx="12192000" cy="830997"/>
+            <a:ext cx="12192000" cy="646331"/>
           </a:xfrm>
           <a:prstGeom prst="rect">
             <a:avLst/>
@@ -4419,19 +4332,17 @@
           <a:p>
             <a:pPr algn="ctr"/>
             <a:r>
-              <a:rPr lang="en-US" sz="4800" b="1" dirty="0">
+              <a:rPr lang="en-US" sz="3600" b="1" dirty="0">
                 <a:solidFill>
                   <a:srgbClr val="000066"/>
                 </a:solidFill>
-                <a:effectLst/>
               </a:rPr>
-              <a:t>( 1 )</a:t>
-            </a:r>
-            <a:endParaRPr lang="vi-VN" sz="4800" b="1" dirty="0">
+              <a:t>( 1 / 3 )</a:t>
+            </a:r>
+            <a:endParaRPr lang="vi-VN" sz="3600" b="1" dirty="0">
               <a:solidFill>
                 <a:srgbClr val="000066"/>
               </a:solidFill>
-              <a:effectLst/>
             </a:endParaRPr>
           </a:p>
         </p:txBody>
@@ -4446,13 +4357,6 @@
   <p:clrMapOvr>
     <a:masterClrMapping/>
   </p:clrMapOvr>
-  <p:timing>
-    <p:tnLst>
-      <p:par>
-        <p:cTn id="1" dur="indefinite" restart="never" nodeType="tmRoot"/>
-      </p:par>
-    </p:tnLst>
-  </p:timing>
 </p:sld>
 </file>
 
@@ -4553,7 +4457,7 @@
         <p:spPr>
           <a:xfrm>
             <a:off x="0" y="5061182"/>
-            <a:ext cx="12192000" cy="830997"/>
+            <a:ext cx="12192000" cy="646331"/>
           </a:xfrm>
           <a:prstGeom prst="rect">
             <a:avLst/>
@@ -4568,19 +4472,17 @@
           <a:p>
             <a:pPr algn="ctr"/>
             <a:r>
-              <a:rPr lang="en-US" sz="4800" b="1" dirty="0">
+              <a:rPr lang="en-US" sz="3600" b="1" dirty="0">
                 <a:solidFill>
                   <a:srgbClr val="000066"/>
                 </a:solidFill>
-                <a:effectLst/>
               </a:rPr>
-              <a:t>( 2 )</a:t>
-            </a:r>
-            <a:endParaRPr lang="vi-VN" sz="4800" b="1" dirty="0">
+              <a:t>( 2 / 3 )</a:t>
+            </a:r>
+            <a:endParaRPr lang="vi-VN" sz="3600" b="1" dirty="0">
               <a:solidFill>
                 <a:srgbClr val="000066"/>
               </a:solidFill>
-              <a:effectLst/>
             </a:endParaRPr>
           </a:p>
         </p:txBody>
@@ -4595,13 +4497,6 @@
   <p:clrMapOvr>
     <a:masterClrMapping/>
   </p:clrMapOvr>
-  <p:timing>
-    <p:tnLst>
-      <p:par>
-        <p:cTn id="1" dur="indefinite" restart="never" nodeType="tmRoot"/>
-      </p:par>
-    </p:tnLst>
-  </p:timing>
 </p:sld>
 </file>
 
@@ -4702,7 +4597,7 @@
         <p:spPr>
           <a:xfrm>
             <a:off x="0" y="5061182"/>
-            <a:ext cx="12192000" cy="830997"/>
+            <a:ext cx="12192000" cy="646331"/>
           </a:xfrm>
           <a:prstGeom prst="rect">
             <a:avLst/>
@@ -4717,19 +4612,17 @@
           <a:p>
             <a:pPr algn="ctr"/>
             <a:r>
-              <a:rPr lang="en-US" sz="4800" b="1" dirty="0">
+              <a:rPr lang="en-US" sz="3600" b="1" dirty="0">
                 <a:solidFill>
                   <a:srgbClr val="000066"/>
                 </a:solidFill>
-                <a:effectLst/>
               </a:rPr>
-              <a:t>( 2 )</a:t>
-            </a:r>
-            <a:endParaRPr lang="vi-VN" sz="4800" b="1" dirty="0">
+              <a:t>( 2 / 3 )</a:t>
+            </a:r>
+            <a:endParaRPr lang="vi-VN" sz="3600" b="1" dirty="0">
               <a:solidFill>
                 <a:srgbClr val="000066"/>
               </a:solidFill>
-              <a:effectLst/>
             </a:endParaRPr>
           </a:p>
         </p:txBody>
@@ -4744,13 +4637,6 @@
   <p:clrMapOvr>
     <a:masterClrMapping/>
   </p:clrMapOvr>
-  <p:timing>
-    <p:tnLst>
-      <p:par>
-        <p:cTn id="1" dur="indefinite" restart="never" nodeType="tmRoot"/>
-      </p:par>
-    </p:tnLst>
-  </p:timing>
 </p:sld>
 </file>
 
@@ -4797,7 +4683,7 @@
               <a:buNone/>
             </a:pPr>
             <a:r>
-              <a:rPr lang="zh-CN" altLang="en-US" sz="6400" b="1" dirty="0" smtClean="0">
+              <a:rPr lang="zh-CN" altLang="en-US" sz="6400" b="1" dirty="0">
                 <a:solidFill>
                   <a:srgbClr val="000066"/>
                 </a:solidFill>
@@ -4805,18 +4691,7 @@
                 <a:latin typeface="Microsoft JhengHei" pitchFamily="34" charset="-120"/>
                 <a:ea typeface="Microsoft JhengHei" pitchFamily="34" charset="-120"/>
               </a:rPr>
-              <a:t>昔曾命</a:t>
-            </a:r>
-            <a:r>
-              <a:rPr lang="zh-CN" altLang="en-US" sz="6400" b="1" dirty="0">
-                <a:solidFill>
-                  <a:srgbClr val="000066"/>
-                </a:solidFill>
-                <a:effectLst/>
-                <a:latin typeface="Microsoft JhengHei" pitchFamily="34" charset="-120"/>
-                <a:ea typeface="Microsoft JhengHei" pitchFamily="34" charset="-120"/>
-              </a:rPr>
-              <a:t>我求拜主面</a:t>
+              <a:t>昔曾命我求拜主面</a:t>
             </a:r>
             <a:endParaRPr lang="en-US" altLang="zh-CN" sz="6400" b="1" dirty="0">
               <a:solidFill>
@@ -4862,7 +4737,7 @@
         <p:spPr>
           <a:xfrm>
             <a:off x="0" y="5061182"/>
-            <a:ext cx="12192000" cy="830997"/>
+            <a:ext cx="12192000" cy="646331"/>
           </a:xfrm>
           <a:prstGeom prst="rect">
             <a:avLst/>
@@ -4877,19 +4752,17 @@
           <a:p>
             <a:pPr algn="ctr"/>
             <a:r>
-              <a:rPr lang="en-US" sz="4800" b="1" dirty="0">
+              <a:rPr lang="en-US" sz="3600" b="1" dirty="0">
                 <a:solidFill>
                   <a:srgbClr val="000066"/>
                 </a:solidFill>
-                <a:effectLst/>
               </a:rPr>
-              <a:t>( 2 )</a:t>
-            </a:r>
-            <a:endParaRPr lang="vi-VN" sz="4800" b="1" dirty="0">
+              <a:t>( 2 / 3 )</a:t>
+            </a:r>
+            <a:endParaRPr lang="vi-VN" sz="3600" b="1" dirty="0">
               <a:solidFill>
                 <a:srgbClr val="000066"/>
               </a:solidFill>
-              <a:effectLst/>
             </a:endParaRPr>
           </a:p>
         </p:txBody>
@@ -4904,13 +4777,6 @@
   <p:clrMapOvr>
     <a:masterClrMapping/>
   </p:clrMapOvr>
-  <p:timing>
-    <p:tnLst>
-      <p:par>
-        <p:cTn id="1" dur="indefinite" restart="never" nodeType="tmRoot"/>
-      </p:par>
-    </p:tnLst>
-  </p:timing>
 </p:sld>
 </file>
 
@@ -5011,7 +4877,7 @@
         <p:spPr>
           <a:xfrm>
             <a:off x="0" y="5061182"/>
-            <a:ext cx="12192000" cy="830997"/>
+            <a:ext cx="12192000" cy="646331"/>
           </a:xfrm>
           <a:prstGeom prst="rect">
             <a:avLst/>
@@ -5026,19 +4892,17 @@
           <a:p>
             <a:pPr algn="ctr"/>
             <a:r>
-              <a:rPr lang="en-US" sz="4800" b="1" dirty="0">
+              <a:rPr lang="en-US" sz="3600" b="1" dirty="0">
                 <a:solidFill>
                   <a:srgbClr val="000066"/>
                 </a:solidFill>
-                <a:effectLst/>
               </a:rPr>
-              <a:t>( 2 )</a:t>
-            </a:r>
-            <a:endParaRPr lang="vi-VN" sz="4800" b="1" dirty="0">
+              <a:t>( 2 / 3 )</a:t>
+            </a:r>
+            <a:endParaRPr lang="vi-VN" sz="3600" b="1" dirty="0">
               <a:solidFill>
                 <a:srgbClr val="000066"/>
               </a:solidFill>
-              <a:effectLst/>
             </a:endParaRPr>
           </a:p>
         </p:txBody>
@@ -5053,13 +4917,6 @@
   <p:clrMapOvr>
     <a:masterClrMapping/>
   </p:clrMapOvr>
-  <p:timing>
-    <p:tnLst>
-      <p:par>
-        <p:cTn id="1" dur="indefinite" restart="never" nodeType="tmRoot"/>
-      </p:par>
-    </p:tnLst>
-  </p:timing>
 </p:sld>
 </file>
 
